--- a/L8-reducing-emissions.pptx
+++ b/L8-reducing-emissions.pptx
@@ -134,20 +134,12 @@
 </p:presentation>
 </file>
 
-<file path=ppt/revisionInfo.xml><?xml version="1.0" encoding="utf-8"?>
-<p1510:revInfo xmlns:a="http://schemas.openxmlformats.org/drawingml/2006/main" xmlns:r="http://schemas.openxmlformats.org/officeDocument/2006/relationships" xmlns:p1510="http://schemas.microsoft.com/office/powerpoint/2015/10/main">
-  <p1510:revLst>
-    <p1510:client id="{B040566D-8CF8-C54D-9532-E29B88D8DE57}" v="1" dt="2026-02-04T08:22:19.251"/>
-  </p1510:revLst>
-</p1510:revInfo>
-</file>
-
 <file path=ppt/changesInfos/changesInfo1.xml><?xml version="1.0" encoding="utf-8"?>
 <pc:chgInfo xmlns:a="http://schemas.openxmlformats.org/drawingml/2006/main" xmlns:r="http://schemas.openxmlformats.org/officeDocument/2006/relationships" xmlns:ac="http://schemas.microsoft.com/office/drawing/2013/main/command" xmlns:pc="http://schemas.microsoft.com/office/powerpoint/2013/main/command">
   <pc:docChgLst>
     <pc:chgData name="Andrew Turner" userId="9b60647a-c825-4266-aafa-670849c64782" providerId="ADAL" clId="{292526B5-234E-5EAA-AFB8-0412B8CA4453}"/>
     <pc:docChg chg="custSel modSld modMainMaster">
-      <pc:chgData name="Andrew Turner" userId="9b60647a-c825-4266-aafa-670849c64782" providerId="ADAL" clId="{292526B5-234E-5EAA-AFB8-0412B8CA4453}" dt="2026-02-04T08:28:42.438" v="21" actId="1035"/>
+      <pc:chgData name="Andrew Turner" userId="9b60647a-c825-4266-aafa-670849c64782" providerId="ADAL" clId="{292526B5-234E-5EAA-AFB8-0412B8CA4453}" dt="2026-02-25T21:26:45.013" v="26" actId="20577"/>
       <pc:docMkLst>
         <pc:docMk/>
       </pc:docMkLst>
@@ -182,6 +174,36 @@
         </pc:spChg>
       </pc:sldChg>
       <pc:sldChg chg="modSp mod">
+        <pc:chgData name="Andrew Turner" userId="9b60647a-c825-4266-aafa-670849c64782" providerId="ADAL" clId="{292526B5-234E-5EAA-AFB8-0412B8CA4453}" dt="2026-02-25T21:25:14.147" v="22" actId="58"/>
+        <pc:sldMkLst>
+          <pc:docMk/>
+          <pc:sldMk cId="2169989881" sldId="266"/>
+        </pc:sldMkLst>
+        <pc:spChg chg="mod">
+          <ac:chgData name="Andrew Turner" userId="9b60647a-c825-4266-aafa-670849c64782" providerId="ADAL" clId="{292526B5-234E-5EAA-AFB8-0412B8CA4453}" dt="2026-02-25T21:25:14.147" v="22" actId="58"/>
+          <ac:spMkLst>
+            <pc:docMk/>
+            <pc:sldMk cId="2169989881" sldId="266"/>
+            <ac:spMk id="3" creationId="{C399C7F3-B208-BE4A-89F4-D400142A9B10}"/>
+          </ac:spMkLst>
+        </pc:spChg>
+      </pc:sldChg>
+      <pc:sldChg chg="modSp mod">
+        <pc:chgData name="Andrew Turner" userId="9b60647a-c825-4266-aafa-670849c64782" providerId="ADAL" clId="{292526B5-234E-5EAA-AFB8-0412B8CA4453}" dt="2026-02-25T21:25:53.677" v="23" actId="20577"/>
+        <pc:sldMkLst>
+          <pc:docMk/>
+          <pc:sldMk cId="1212826970" sldId="271"/>
+        </pc:sldMkLst>
+        <pc:spChg chg="mod">
+          <ac:chgData name="Andrew Turner" userId="9b60647a-c825-4266-aafa-670849c64782" providerId="ADAL" clId="{292526B5-234E-5EAA-AFB8-0412B8CA4453}" dt="2026-02-25T21:25:53.677" v="23" actId="20577"/>
+          <ac:spMkLst>
+            <pc:docMk/>
+            <pc:sldMk cId="1212826970" sldId="271"/>
+            <ac:spMk id="3" creationId="{D4393C8A-7D7D-F3EE-1F7B-502C9229DC69}"/>
+          </ac:spMkLst>
+        </pc:spChg>
+      </pc:sldChg>
+      <pc:sldChg chg="modSp mod">
         <pc:chgData name="Andrew Turner" userId="9b60647a-c825-4266-aafa-670849c64782" providerId="ADAL" clId="{292526B5-234E-5EAA-AFB8-0412B8CA4453}" dt="2026-02-04T08:28:23.051" v="7" actId="20577"/>
         <pc:sldMkLst>
           <pc:docMk/>
@@ -193,6 +215,36 @@
             <pc:docMk/>
             <pc:sldMk cId="3941669629" sldId="272"/>
             <ac:spMk id="3" creationId="{B033ABD3-5676-F2B4-B06E-594BC9F5CCAD}"/>
+          </ac:spMkLst>
+        </pc:spChg>
+      </pc:sldChg>
+      <pc:sldChg chg="modSp mod">
+        <pc:chgData name="Andrew Turner" userId="9b60647a-c825-4266-aafa-670849c64782" providerId="ADAL" clId="{292526B5-234E-5EAA-AFB8-0412B8CA4453}" dt="2026-02-25T21:26:25.922" v="25" actId="121"/>
+        <pc:sldMkLst>
+          <pc:docMk/>
+          <pc:sldMk cId="1266173411" sldId="273"/>
+        </pc:sldMkLst>
+        <pc:spChg chg="mod">
+          <ac:chgData name="Andrew Turner" userId="9b60647a-c825-4266-aafa-670849c64782" providerId="ADAL" clId="{292526B5-234E-5EAA-AFB8-0412B8CA4453}" dt="2026-02-25T21:26:25.922" v="25" actId="121"/>
+          <ac:spMkLst>
+            <pc:docMk/>
+            <pc:sldMk cId="1266173411" sldId="273"/>
+            <ac:spMk id="3" creationId="{D6426B73-9498-BA77-643A-9C37EF1E6839}"/>
+          </ac:spMkLst>
+        </pc:spChg>
+      </pc:sldChg>
+      <pc:sldChg chg="modSp mod">
+        <pc:chgData name="Andrew Turner" userId="9b60647a-c825-4266-aafa-670849c64782" providerId="ADAL" clId="{292526B5-234E-5EAA-AFB8-0412B8CA4453}" dt="2026-02-25T21:26:45.013" v="26" actId="20577"/>
+        <pc:sldMkLst>
+          <pc:docMk/>
+          <pc:sldMk cId="2193505144" sldId="274"/>
+        </pc:sldMkLst>
+        <pc:spChg chg="mod">
+          <ac:chgData name="Andrew Turner" userId="9b60647a-c825-4266-aafa-670849c64782" providerId="ADAL" clId="{292526B5-234E-5EAA-AFB8-0412B8CA4453}" dt="2026-02-25T21:26:45.013" v="26" actId="20577"/>
+          <ac:spMkLst>
+            <pc:docMk/>
+            <pc:sldMk cId="2193505144" sldId="274"/>
+            <ac:spMk id="3" creationId="{93D44A5B-0791-6C6C-3EAE-E005D3CDAE4B}"/>
           </ac:spMkLst>
         </pc:spChg>
       </pc:sldChg>
@@ -363,7 +415,7 @@
           <a:p>
             <a:fld id="{401BCBAA-4F76-C245-9463-A5D066D6963D}" type="datetimeFigureOut">
               <a:rPr lang="en-GB" smtClean="0"/>
-              <a:t>03/02/2026</a:t>
+              <a:t>25/02/2026</a:t>
             </a:fld>
             <a:endParaRPr lang="en-GB"/>
           </a:p>
@@ -561,7 +613,7 @@
           <a:p>
             <a:fld id="{401BCBAA-4F76-C245-9463-A5D066D6963D}" type="datetimeFigureOut">
               <a:rPr lang="en-GB" smtClean="0"/>
-              <a:t>03/02/2026</a:t>
+              <a:t>25/02/2026</a:t>
             </a:fld>
             <a:endParaRPr lang="en-GB"/>
           </a:p>
@@ -769,7 +821,7 @@
           <a:p>
             <a:fld id="{401BCBAA-4F76-C245-9463-A5D066D6963D}" type="datetimeFigureOut">
               <a:rPr lang="en-GB" smtClean="0"/>
-              <a:t>03/02/2026</a:t>
+              <a:t>25/02/2026</a:t>
             </a:fld>
             <a:endParaRPr lang="en-GB"/>
           </a:p>
@@ -967,7 +1019,7 @@
           <a:p>
             <a:fld id="{401BCBAA-4F76-C245-9463-A5D066D6963D}" type="datetimeFigureOut">
               <a:rPr lang="en-GB" smtClean="0"/>
-              <a:t>03/02/2026</a:t>
+              <a:t>25/02/2026</a:t>
             </a:fld>
             <a:endParaRPr lang="en-GB"/>
           </a:p>
@@ -1242,7 +1294,7 @@
           <a:p>
             <a:fld id="{401BCBAA-4F76-C245-9463-A5D066D6963D}" type="datetimeFigureOut">
               <a:rPr lang="en-GB" smtClean="0"/>
-              <a:t>03/02/2026</a:t>
+              <a:t>25/02/2026</a:t>
             </a:fld>
             <a:endParaRPr lang="en-GB"/>
           </a:p>
@@ -1507,7 +1559,7 @@
           <a:p>
             <a:fld id="{401BCBAA-4F76-C245-9463-A5D066D6963D}" type="datetimeFigureOut">
               <a:rPr lang="en-GB" smtClean="0"/>
-              <a:t>03/02/2026</a:t>
+              <a:t>25/02/2026</a:t>
             </a:fld>
             <a:endParaRPr lang="en-GB"/>
           </a:p>
@@ -1919,7 +1971,7 @@
           <a:p>
             <a:fld id="{401BCBAA-4F76-C245-9463-A5D066D6963D}" type="datetimeFigureOut">
               <a:rPr lang="en-GB" smtClean="0"/>
-              <a:t>03/02/2026</a:t>
+              <a:t>25/02/2026</a:t>
             </a:fld>
             <a:endParaRPr lang="en-GB"/>
           </a:p>
@@ -2060,7 +2112,7 @@
           <a:p>
             <a:fld id="{401BCBAA-4F76-C245-9463-A5D066D6963D}" type="datetimeFigureOut">
               <a:rPr lang="en-GB" smtClean="0"/>
-              <a:t>03/02/2026</a:t>
+              <a:t>25/02/2026</a:t>
             </a:fld>
             <a:endParaRPr lang="en-GB"/>
           </a:p>
@@ -2173,7 +2225,7 @@
           <a:p>
             <a:fld id="{401BCBAA-4F76-C245-9463-A5D066D6963D}" type="datetimeFigureOut">
               <a:rPr lang="en-GB" smtClean="0"/>
-              <a:t>03/02/2026</a:t>
+              <a:t>25/02/2026</a:t>
             </a:fld>
             <a:endParaRPr lang="en-GB"/>
           </a:p>
@@ -2484,7 +2536,7 @@
           <a:p>
             <a:fld id="{401BCBAA-4F76-C245-9463-A5D066D6963D}" type="datetimeFigureOut">
               <a:rPr lang="en-GB" smtClean="0"/>
-              <a:t>03/02/2026</a:t>
+              <a:t>25/02/2026</a:t>
             </a:fld>
             <a:endParaRPr lang="en-GB"/>
           </a:p>
@@ -2772,7 +2824,7 @@
           <a:p>
             <a:fld id="{401BCBAA-4F76-C245-9463-A5D066D6963D}" type="datetimeFigureOut">
               <a:rPr lang="en-GB" smtClean="0"/>
-              <a:t>03/02/2026</a:t>
+              <a:t>25/02/2026</a:t>
             </a:fld>
             <a:endParaRPr lang="en-GB"/>
           </a:p>
@@ -3016,7 +3068,7 @@
           <a:p>
             <a:fld id="{401BCBAA-4F76-C245-9463-A5D066D6963D}" type="datetimeFigureOut">
               <a:rPr lang="en-GB" smtClean="0"/>
-              <a:t>03/02/2026</a:t>
+              <a:t>25/02/2026</a:t>
             </a:fld>
             <a:endParaRPr lang="en-GB"/>
           </a:p>
@@ -4037,7 +4089,15 @@
           <a:p>
             <a:r>
               <a:rPr lang="en-GB" dirty="0"/>
-              <a:t>Emitted CO2 stays in the atmosphere for 5,000 years – any durability shorter than this is of limited use</a:t>
+              <a:t>Emitted CO</a:t>
+            </a:r>
+            <a:r>
+              <a:rPr lang="en-GB" baseline="-25000" dirty="0"/>
+              <a:t>2</a:t>
+            </a:r>
+            <a:r>
+              <a:rPr lang="en-GB" dirty="0"/>
+              <a:t> stays in the atmosphere for 5,000 years – any durability shorter than this is of limited use</a:t>
             </a:r>
           </a:p>
           <a:p>
@@ -4371,7 +4431,7 @@
             <a:pPr lvl="1"/>
             <a:r>
               <a:rPr lang="en-GB" dirty="0"/>
-              <a:t>Expectation to cover business travel from Scope 3 but n requirement</a:t>
+              <a:t>Expectation to cover business travel from Scope 3 but no requirement</a:t>
             </a:r>
           </a:p>
           <a:p>
@@ -4720,6 +4780,11 @@
               <a:rPr lang="en-GB" i="1" dirty="0"/>
               <a:t>“We seem to need reminding that computing is not exempt from having to drastically reduce emissions. Instead of assuming computing can innovate the path to a greater future, the bravest and most heroic action the computing sector could take is to show restraint and leadership, …” </a:t>
             </a:r>
+          </a:p>
+          <a:p>
+            <a:pPr marL="0" indent="0" algn="r">
+              <a:buNone/>
+            </a:pPr>
             <a:r>
               <a:rPr lang="en-GB" dirty="0"/>
               <a:t>Bran Knowles et al. </a:t>
@@ -4935,7 +5000,7 @@
           <a:p>
             <a:r>
               <a:rPr lang="en-GB" dirty="0"/>
-              <a:t>Before looking at more specific approaches we must make sure any use of HPC systems is actually producing useful output</a:t>
+              <a:t>Before looking at more specific approaches we must make sure any use of HPC systems is producing useful output</a:t>
             </a:r>
           </a:p>
           <a:p>
